--- a/docs/en/sales/ownly-pricing-and-offer.pptx
+++ b/docs/en/sales/ownly-pricing-and-offer.pptx
@@ -1658,7 +1658,7 @@
         <p:spPr>
           <a:xfrm>
             <a:off x="640080" y="1828800"/>
-            <a:ext cx="3429000" cy="4023360"/>
+            <a:ext cx="3429000" cy="4343400"/>
           </a:xfrm>
           <a:prstGeom prst="roundRect">
             <a:avLst>
@@ -1797,7 +1797,7 @@
         <p:spPr>
           <a:xfrm>
             <a:off x="914400" y="3520440"/>
-            <a:ext cx="2880360" cy="914400"/>
+            <a:ext cx="2880360" cy="1234440"/>
           </a:xfrm>
           <a:prstGeom prst="rect">
             <a:avLst/>
@@ -1850,41 +1850,62 @@
             </a:r>
             <a:endParaRPr lang="en-US" sz="1350" dirty="0"/>
           </a:p>
-        </p:txBody>
-      </p:sp>
-      <p:sp>
-        <p:nvSpPr>
-          <p:cNvPr id="9" name="Text 7"/>
-          <p:cNvSpPr txBox="1"/>
-          <p:nvPr/>
-        </p:nvSpPr>
-        <p:spPr>
-          <a:xfrm>
-            <a:off x="914400" y="4526280"/>
-            <a:ext cx="2880360" cy="822960"/>
-          </a:xfrm>
-          <a:prstGeom prst="rect">
-            <a:avLst/>
-          </a:prstGeom>
-          <a:noFill/>
-          <a:ln/>
-        </p:spPr>
-        <p:txBody>
-          <a:bodyPr wrap="square" lIns="0" tIns="0" rIns="0" bIns="0" rtlCol="0" anchor="ctr"/>
-          <a:lstStyle/>
-          <a:p>
-            <a:pPr indent="0" marL="0">
-              <a:buNone/>
-            </a:pPr>
-            <a:r>
-              <a:rPr lang="en-US" sz="1150" i="1" dirty="0">
-                <a:solidFill>
-                  <a:srgbClr val="A9A6C9"/>
+          <a:p>
+            <a:pPr marL="342900" indent="-342900">
+              <a:spcAft>
+                <a:spcPts val="800"/>
+              </a:spcAft>
+              <a:buSzPct val="100000"/>
+              <a:buChar char="✦"/>
+            </a:pPr>
+            <a:r>
+              <a:rPr lang="en-US" sz="1350" dirty="0">
+                <a:solidFill>
+                  <a:srgbClr val="F4F1E8"/>
                 </a:solidFill>
                 <a:latin typeface="Calibri" pitchFamily="34" charset="0"/>
                 <a:ea typeface="Calibri" pitchFamily="34" charset="-122"/>
                 <a:cs typeface="Calibri" pitchFamily="34" charset="-120"/>
               </a:rPr>
+              <a:t>10 story suggestions / hr</a:t>
+            </a:r>
+            <a:endParaRPr lang="en-US" sz="1350" dirty="0"/>
+          </a:p>
+        </p:txBody>
+      </p:sp>
+      <p:sp>
+        <p:nvSpPr>
+          <p:cNvPr id="9" name="Text 7"/>
+          <p:cNvSpPr txBox="1"/>
+          <p:nvPr/>
+        </p:nvSpPr>
+        <p:spPr>
+          <a:xfrm>
+            <a:off x="914400" y="4846320"/>
+            <a:ext cx="2880360" cy="822960"/>
+          </a:xfrm>
+          <a:prstGeom prst="rect">
+            <a:avLst/>
+          </a:prstGeom>
+          <a:noFill/>
+          <a:ln/>
+        </p:spPr>
+        <p:txBody>
+          <a:bodyPr wrap="square" lIns="0" tIns="0" rIns="0" bIns="0" rtlCol="0" anchor="ctr"/>
+          <a:lstStyle/>
+          <a:p>
+            <a:pPr indent="0" marL="0">
+              <a:buNone/>
+            </a:pPr>
+            <a:r>
+              <a:rPr lang="en-US" sz="1150" i="1" dirty="0">
+                <a:solidFill>
+                  <a:srgbClr val="A9A6C9"/>
+                </a:solidFill>
+                <a:latin typeface="Calibri" pitchFamily="34" charset="0"/>
+                <a:ea typeface="Calibri" pitchFamily="34" charset="-122"/>
+                <a:cs typeface="Calibri" pitchFamily="34" charset="-120"/>
+              </a:rPr>
               <a:t>A single branch piloting the product</a:t>
             </a:r>
             <a:endParaRPr lang="en-US" sz="1150" dirty="0"/>
@@ -1900,7 +1921,7 @@
         <p:spPr>
           <a:xfrm>
             <a:off x="4343400" y="1691640"/>
-            <a:ext cx="3429000" cy="4160520"/>
+            <a:ext cx="3429000" cy="4480560"/>
           </a:xfrm>
           <a:prstGeom prst="roundRect">
             <a:avLst>
@@ -2105,7 +2126,7 @@
         <p:spPr>
           <a:xfrm>
             <a:off x="4617720" y="3383280"/>
-            <a:ext cx="2880360" cy="914400"/>
+            <a:ext cx="2880360" cy="1234440"/>
           </a:xfrm>
           <a:prstGeom prst="rect">
             <a:avLst/>
@@ -2158,41 +2179,62 @@
             </a:r>
             <a:endParaRPr lang="en-US" sz="1350" dirty="0"/>
           </a:p>
-        </p:txBody>
-      </p:sp>
-      <p:sp>
-        <p:nvSpPr>
-          <p:cNvPr id="17" name="Text 15"/>
-          <p:cNvSpPr txBox="1"/>
-          <p:nvPr/>
-        </p:nvSpPr>
-        <p:spPr>
-          <a:xfrm>
-            <a:off x="4617720" y="4389120"/>
-            <a:ext cx="2880360" cy="822960"/>
-          </a:xfrm>
-          <a:prstGeom prst="rect">
-            <a:avLst/>
-          </a:prstGeom>
-          <a:noFill/>
-          <a:ln/>
-        </p:spPr>
-        <p:txBody>
-          <a:bodyPr wrap="square" lIns="0" tIns="0" rIns="0" bIns="0" rtlCol="0" anchor="ctr"/>
-          <a:lstStyle/>
-          <a:p>
-            <a:pPr indent="0" marL="0">
-              <a:buNone/>
-            </a:pPr>
-            <a:r>
-              <a:rPr lang="en-US" sz="1150" i="1" dirty="0">
-                <a:solidFill>
-                  <a:srgbClr val="A9A6C9"/>
+          <a:p>
+            <a:pPr marL="342900" indent="-342900">
+              <a:spcAft>
+                <a:spcPts val="800"/>
+              </a:spcAft>
+              <a:buSzPct val="100000"/>
+              <a:buChar char="✦"/>
+            </a:pPr>
+            <a:r>
+              <a:rPr lang="en-US" sz="1350" dirty="0">
+                <a:solidFill>
+                  <a:srgbClr val="F4F1E8"/>
                 </a:solidFill>
                 <a:latin typeface="Calibri" pitchFamily="34" charset="0"/>
                 <a:ea typeface="Calibri" pitchFamily="34" charset="-122"/>
                 <a:cs typeface="Calibri" pitchFamily="34" charset="-120"/>
               </a:rPr>
+              <a:t>20 story suggestions / hr</a:t>
+            </a:r>
+            <a:endParaRPr lang="en-US" sz="1350" dirty="0"/>
+          </a:p>
+        </p:txBody>
+      </p:sp>
+      <p:sp>
+        <p:nvSpPr>
+          <p:cNvPr id="17" name="Text 15"/>
+          <p:cNvSpPr txBox="1"/>
+          <p:nvPr/>
+        </p:nvSpPr>
+        <p:spPr>
+          <a:xfrm>
+            <a:off x="4617720" y="4709160"/>
+            <a:ext cx="2880360" cy="822960"/>
+          </a:xfrm>
+          <a:prstGeom prst="rect">
+            <a:avLst/>
+          </a:prstGeom>
+          <a:noFill/>
+          <a:ln/>
+        </p:spPr>
+        <p:txBody>
+          <a:bodyPr wrap="square" lIns="0" tIns="0" rIns="0" bIns="0" rtlCol="0" anchor="ctr"/>
+          <a:lstStyle/>
+          <a:p>
+            <a:pPr indent="0" marL="0">
+              <a:buNone/>
+            </a:pPr>
+            <a:r>
+              <a:rPr lang="en-US" sz="1150" i="1" dirty="0">
+                <a:solidFill>
+                  <a:srgbClr val="A9A6C9"/>
+                </a:solidFill>
+                <a:latin typeface="Calibri" pitchFamily="34" charset="0"/>
+                <a:ea typeface="Calibri" pitchFamily="34" charset="-122"/>
+                <a:cs typeface="Calibri" pitchFamily="34" charset="-120"/>
+              </a:rPr>
               <a:t>A multi-branch nursery or a school</a:t>
             </a:r>
             <a:endParaRPr lang="en-US" sz="1150" dirty="0"/>
@@ -2208,7 +2250,7 @@
         <p:spPr>
           <a:xfrm>
             <a:off x="8046720" y="1828800"/>
-            <a:ext cx="3429000" cy="4023360"/>
+            <a:ext cx="3429000" cy="4343400"/>
           </a:xfrm>
           <a:prstGeom prst="roundRect">
             <a:avLst>
@@ -2347,7 +2389,7 @@
         <p:spPr>
           <a:xfrm>
             <a:off x="8321040" y="3520440"/>
-            <a:ext cx="2880360" cy="914400"/>
+            <a:ext cx="2880360" cy="1234440"/>
           </a:xfrm>
           <a:prstGeom prst="rect">
             <a:avLst/>
@@ -2400,57 +2442,39 @@
             </a:r>
             <a:endParaRPr lang="en-US" sz="1350" dirty="0"/>
           </a:p>
-        </p:txBody>
-      </p:sp>
-      <p:sp>
-        <p:nvSpPr>
-          <p:cNvPr id="23" name="Text 21"/>
-          <p:cNvSpPr txBox="1"/>
-          <p:nvPr/>
-        </p:nvSpPr>
-        <p:spPr>
-          <a:xfrm>
-            <a:off x="8321040" y="4526280"/>
-            <a:ext cx="2880360" cy="822960"/>
-          </a:xfrm>
-          <a:prstGeom prst="rect">
-            <a:avLst/>
-          </a:prstGeom>
-          <a:noFill/>
-          <a:ln/>
-        </p:spPr>
-        <p:txBody>
-          <a:bodyPr wrap="square" lIns="0" tIns="0" rIns="0" bIns="0" rtlCol="0" anchor="ctr"/>
-          <a:lstStyle/>
-          <a:p>
-            <a:pPr indent="0" marL="0">
-              <a:buNone/>
-            </a:pPr>
-            <a:r>
-              <a:rPr lang="en-US" sz="1150" i="1" dirty="0">
-                <a:solidFill>
-                  <a:srgbClr val="A9A6C9"/>
+          <a:p>
+            <a:pPr marL="342900" indent="-342900">
+              <a:spcAft>
+                <a:spcPts val="800"/>
+              </a:spcAft>
+              <a:buSzPct val="100000"/>
+              <a:buChar char="✦"/>
+            </a:pPr>
+            <a:r>
+              <a:rPr lang="en-US" sz="1350" dirty="0">
+                <a:solidFill>
+                  <a:srgbClr val="F4F1E8"/>
                 </a:solidFill>
                 <a:latin typeface="Calibri" pitchFamily="34" charset="0"/>
                 <a:ea typeface="Calibri" pitchFamily="34" charset="-122"/>
                 <a:cs typeface="Calibri" pitchFamily="34" charset="-120"/>
               </a:rPr>
-              <a:t>A nursery group running across many locations</a:t>
-            </a:r>
-            <a:endParaRPr lang="en-US" sz="1150" dirty="0"/>
-          </a:p>
-        </p:txBody>
-      </p:sp>
-      <p:sp>
-        <p:nvSpPr>
-          <p:cNvPr id="24" name="Text 22"/>
-          <p:cNvSpPr txBox="1"/>
-          <p:nvPr/>
-        </p:nvSpPr>
-        <p:spPr>
-          <a:xfrm>
-            <a:off x="640080" y="5989320"/>
-            <a:ext cx="10881360" cy="457200"/>
+              <a:t>30 story suggestions / hr</a:t>
+            </a:r>
+            <a:endParaRPr lang="en-US" sz="1350" dirty="0"/>
+          </a:p>
+        </p:txBody>
+      </p:sp>
+      <p:sp>
+        <p:nvSpPr>
+          <p:cNvPr id="23" name="Text 21"/>
+          <p:cNvSpPr txBox="1"/>
+          <p:nvPr/>
+        </p:nvSpPr>
+        <p:spPr>
+          <a:xfrm>
+            <a:off x="8321040" y="4846320"/>
+            <a:ext cx="2880360" cy="822960"/>
           </a:xfrm>
           <a:prstGeom prst="rect">
             <a:avLst/>
@@ -2466,7 +2490,7 @@
               <a:buNone/>
             </a:pPr>
             <a:r>
-              <a:rPr lang="en-US" sz="1100" dirty="0">
+              <a:rPr lang="en-US" sz="1150" i="1" dirty="0">
                 <a:solidFill>
                   <a:srgbClr val="A9A6C9"/>
                 </a:solidFill>
@@ -2474,9 +2498,48 @@
                 <a:ea typeface="Calibri" pitchFamily="34" charset="-122"/>
                 <a:cs typeface="Calibri" pitchFamily="34" charset="-120"/>
               </a:rPr>
+              <a:t>A nursery group running across many locations</a:t>
+            </a:r>
+            <a:endParaRPr lang="en-US" sz="1150" dirty="0"/>
+          </a:p>
+        </p:txBody>
+      </p:sp>
+      <p:sp>
+        <p:nvSpPr>
+          <p:cNvPr id="24" name="Text 22"/>
+          <p:cNvSpPr txBox="1"/>
+          <p:nvPr/>
+        </p:nvSpPr>
+        <p:spPr>
+          <a:xfrm>
+            <a:off x="640080" y="6199632"/>
+            <a:ext cx="10881360" cy="256032"/>
+          </a:xfrm>
+          <a:prstGeom prst="rect">
+            <a:avLst/>
+          </a:prstGeom>
+          <a:noFill/>
+          <a:ln/>
+        </p:spPr>
+        <p:txBody>
+          <a:bodyPr wrap="square" lIns="0" tIns="0" rIns="0" bIns="0" rtlCol="0" anchor="ctr"/>
+          <a:lstStyle/>
+          <a:p>
+            <a:pPr indent="0" marL="0">
+              <a:buNone/>
+            </a:pPr>
+            <a:r>
+              <a:rPr lang="en-US" sz="1000" dirty="0">
+                <a:solidFill>
+                  <a:srgbClr val="A9A6C9"/>
+                </a:solidFill>
+                <a:latin typeface="Calibri" pitchFamily="34" charset="0"/>
+                <a:ea typeface="Calibri" pitchFamily="34" charset="-122"/>
+                <a:cs typeface="Calibri" pitchFamily="34" charset="-120"/>
+              </a:rPr>
               <a:t>Annual billing: 2 months free on every tier. Every plan includes bilingual (English + Arabic) stories, parent consent management, and PDF download.</a:t>
             </a:r>
-            <a:endParaRPr lang="en-US" sz="1100" dirty="0"/>
+            <a:endParaRPr lang="en-US" sz="1000" dirty="0"/>
           </a:p>
         </p:txBody>
       </p:sp>
@@ -4222,12 +4285,12 @@
         </p:nvSpPr>
         <p:spPr>
           <a:xfrm>
-            <a:off x="1920240" y="2377440"/>
-            <a:ext cx="4206240" cy="2834640"/>
+            <a:off x="1920240" y="2286000"/>
+            <a:ext cx="4206240" cy="3291840"/>
           </a:xfrm>
           <a:prstGeom prst="roundRect">
             <a:avLst>
-              <a:gd name="adj" fmla="val 4516"/>
+              <a:gd name="adj" fmla="val 3889"/>
             </a:avLst>
           </a:prstGeom>
           <a:solidFill>
@@ -4244,7 +4307,7 @@
         </p:nvSpPr>
         <p:spPr>
           <a:xfrm>
-            <a:off x="2240280" y="2697480"/>
+            <a:off x="2240280" y="2606040"/>
             <a:ext cx="3566160" cy="457200"/>
           </a:xfrm>
           <a:prstGeom prst="rect">
@@ -4283,7 +4346,7 @@
         </p:nvSpPr>
         <p:spPr>
           <a:xfrm>
-            <a:off x="2240280" y="3200400"/>
+            <a:off x="2240280" y="3108960"/>
             <a:ext cx="3566160" cy="548640"/>
           </a:xfrm>
           <a:prstGeom prst="rect">
@@ -4336,8 +4399,8 @@
         </p:nvSpPr>
         <p:spPr>
           <a:xfrm>
-            <a:off x="2240280" y="3977640"/>
-            <a:ext cx="3566160" cy="457200"/>
+            <a:off x="2240280" y="3886200"/>
+            <a:ext cx="3566160" cy="822960"/>
           </a:xfrm>
           <a:prstGeom prst="rect">
             <a:avLst/>
@@ -4350,6 +4413,9 @@
           <a:lstStyle/>
           <a:p>
             <a:pPr marL="342900" indent="-342900">
+              <a:spcAft>
+                <a:spcPts val="600"/>
+              </a:spcAft>
               <a:buSzPct val="100000"/>
               <a:buChar char="✦"/>
             </a:pPr>
@@ -4366,41 +4432,62 @@
             </a:r>
             <a:endParaRPr lang="en-US" sz="1400" dirty="0"/>
           </a:p>
-        </p:txBody>
-      </p:sp>
-      <p:sp>
-        <p:nvSpPr>
-          <p:cNvPr id="9" name="Text 7"/>
-          <p:cNvSpPr txBox="1"/>
-          <p:nvPr/>
-        </p:nvSpPr>
-        <p:spPr>
-          <a:xfrm>
-            <a:off x="2240280" y="4526280"/>
-            <a:ext cx="3566160" cy="548640"/>
-          </a:xfrm>
-          <a:prstGeom prst="rect">
-            <a:avLst/>
-          </a:prstGeom>
-          <a:noFill/>
-          <a:ln/>
-        </p:spPr>
-        <p:txBody>
-          <a:bodyPr wrap="square" lIns="0" tIns="0" rIns="0" bIns="0" rtlCol="0" anchor="ctr"/>
-          <a:lstStyle/>
-          <a:p>
-            <a:pPr indent="0" marL="0">
-              <a:buNone/>
-            </a:pPr>
-            <a:r>
-              <a:rPr lang="en-US" sz="1150" i="1" dirty="0">
-                <a:solidFill>
-                  <a:srgbClr val="A9A6C9"/>
+          <a:p>
+            <a:pPr marL="342900" indent="-342900">
+              <a:spcAft>
+                <a:spcPts val="600"/>
+              </a:spcAft>
+              <a:buSzPct val="100000"/>
+              <a:buChar char="✦"/>
+            </a:pPr>
+            <a:r>
+              <a:rPr lang="en-US" sz="1400" dirty="0">
+                <a:solidFill>
+                  <a:srgbClr val="F4F1E8"/>
                 </a:solidFill>
                 <a:latin typeface="Calibri" pitchFamily="34" charset="0"/>
                 <a:ea typeface="Calibri" pitchFamily="34" charset="-122"/>
                 <a:cs typeface="Calibri" pitchFamily="34" charset="-120"/>
               </a:rPr>
+              <a:t>3 story suggestions / hr</a:t>
+            </a:r>
+            <a:endParaRPr lang="en-US" sz="1400" dirty="0"/>
+          </a:p>
+        </p:txBody>
+      </p:sp>
+      <p:sp>
+        <p:nvSpPr>
+          <p:cNvPr id="9" name="Text 7"/>
+          <p:cNvSpPr txBox="1"/>
+          <p:nvPr/>
+        </p:nvSpPr>
+        <p:spPr>
+          <a:xfrm>
+            <a:off x="2240280" y="4892040"/>
+            <a:ext cx="3566160" cy="548640"/>
+          </a:xfrm>
+          <a:prstGeom prst="rect">
+            <a:avLst/>
+          </a:prstGeom>
+          <a:noFill/>
+          <a:ln/>
+        </p:spPr>
+        <p:txBody>
+          <a:bodyPr wrap="square" lIns="0" tIns="0" rIns="0" bIns="0" rtlCol="0" anchor="ctr"/>
+          <a:lstStyle/>
+          <a:p>
+            <a:pPr indent="0" marL="0">
+              <a:buNone/>
+            </a:pPr>
+            <a:r>
+              <a:rPr lang="en-US" sz="1150" i="1" dirty="0">
+                <a:solidFill>
+                  <a:srgbClr val="A9A6C9"/>
+                </a:solidFill>
+                <a:latin typeface="Calibri" pitchFamily="34" charset="0"/>
+                <a:ea typeface="Calibri" pitchFamily="34" charset="-122"/>
+                <a:cs typeface="Calibri" pitchFamily="34" charset="-120"/>
+              </a:rPr>
               <a:t>Printed copies available at the same prices as above.</a:t>
             </a:r>
             <a:endParaRPr lang="en-US" sz="1150" dirty="0"/>
@@ -4415,12 +4502,12 @@
         </p:nvSpPr>
         <p:spPr>
           <a:xfrm>
-            <a:off x="6492240" y="2377440"/>
-            <a:ext cx="4206240" cy="2834640"/>
+            <a:off x="6492240" y="2286000"/>
+            <a:ext cx="4206240" cy="3291840"/>
           </a:xfrm>
           <a:prstGeom prst="roundRect">
             <a:avLst>
-              <a:gd name="adj" fmla="val 4516"/>
+              <a:gd name="adj" fmla="val 3889"/>
             </a:avLst>
           </a:prstGeom>
           <a:solidFill>
@@ -4437,7 +4524,7 @@
         </p:nvSpPr>
         <p:spPr>
           <a:xfrm>
-            <a:off x="6812280" y="2697480"/>
+            <a:off x="6812280" y="2606040"/>
             <a:ext cx="3566160" cy="457200"/>
           </a:xfrm>
           <a:prstGeom prst="rect">
@@ -4476,7 +4563,7 @@
         </p:nvSpPr>
         <p:spPr>
           <a:xfrm>
-            <a:off x="6812280" y="3200400"/>
+            <a:off x="6812280" y="3108960"/>
             <a:ext cx="3566160" cy="548640"/>
           </a:xfrm>
           <a:prstGeom prst="rect">
@@ -4529,8 +4616,8 @@
         </p:nvSpPr>
         <p:spPr>
           <a:xfrm>
-            <a:off x="6812280" y="3977640"/>
-            <a:ext cx="3566160" cy="457200"/>
+            <a:off x="6812280" y="3886200"/>
+            <a:ext cx="3566160" cy="822960"/>
           </a:xfrm>
           <a:prstGeom prst="rect">
             <a:avLst/>
@@ -4543,6 +4630,9 @@
           <a:lstStyle/>
           <a:p>
             <a:pPr marL="342900" indent="-342900">
+              <a:spcAft>
+                <a:spcPts val="600"/>
+              </a:spcAft>
               <a:buSzPct val="100000"/>
               <a:buChar char="✦"/>
             </a:pPr>
@@ -4559,6 +4649,27 @@
             </a:r>
             <a:endParaRPr lang="en-US" sz="1400" dirty="0"/>
           </a:p>
+          <a:p>
+            <a:pPr marL="342900" indent="-342900">
+              <a:spcAft>
+                <a:spcPts val="600"/>
+              </a:spcAft>
+              <a:buSzPct val="100000"/>
+              <a:buChar char="✦"/>
+            </a:pPr>
+            <a:r>
+              <a:rPr lang="en-US" sz="1400" dirty="0">
+                <a:solidFill>
+                  <a:srgbClr val="F4F1E8"/>
+                </a:solidFill>
+                <a:latin typeface="Calibri" pitchFamily="34" charset="0"/>
+                <a:ea typeface="Calibri" pitchFamily="34" charset="-122"/>
+                <a:cs typeface="Calibri" pitchFamily="34" charset="-120"/>
+              </a:rPr>
+              <a:t>5 story suggestions / hr</a:t>
+            </a:r>
+            <a:endParaRPr lang="en-US" sz="1400" dirty="0"/>
+          </a:p>
         </p:txBody>
       </p:sp>
       <p:sp>
@@ -4569,7 +4680,7 @@
         </p:nvSpPr>
         <p:spPr>
           <a:xfrm>
-            <a:off x="6812280" y="4526280"/>
+            <a:off x="6812280" y="4892040"/>
             <a:ext cx="3566160" cy="548640"/>
           </a:xfrm>
           <a:prstGeom prst="rect">
